--- a/Slides/Semana 3/semana_3_slides.pptx
+++ b/Slides/Semana 3/semana_3_slides.pptx
@@ -20,9 +20,10 @@
     <p:sldId id="268" r:id="rId14"/>
     <p:sldId id="269" r:id="rId15"/>
     <p:sldId id="270" r:id="rId16"/>
+    <p:sldId id="271" r:id="rId17"/>
   </p:sldIdLst>
   <p:notesMasterIdLst>
-    <p:notesMasterId r:id="rId17"/>
+    <p:notesMasterId r:id="rId18"/>
   </p:notesMasterIdLst>
   <p:sldSz cx="12192000" cy="6858000"/>
   <p:notesSz cx="6858000" cy="12192000"/>
@@ -868,7 +869,7 @@
           <a:p>
             <a:r>
               <a:rPr lang="en-US" dirty="0"/>
-              <a:t>Notas: Amarrar a mini aula. Cada item volta aplicado na produção em estúdio. Não reler tudo — apontar a conexão com o próximo passo: a demonstração no asset real.</a:t>
+              <a:t>Notas: Contextualizar o valor profissional. Seam placement mal feito é um dos primeiros pontos observados em qualquer review técnico de asset, independente da qualidade da textura aplicada. Amarra à CF1 desta semana (C3 avaliado pela primeira vez): o padrão de exigência técnica que começa aqui é o mesmo cobrado profissionalmente.</a:t>
             </a:r>
             <a:endParaRPr lang="en-US" dirty="0"/>
           </a:p>
@@ -956,7 +957,7 @@
           <a:p>
             <a:r>
               <a:rPr lang="en-US" dirty="0"/>
-              <a:t>Notas: Reduzir a ansiedade da primeira crítica formal. Deixar claro: um UV com problemas + boa explicação vale mais pedagogicamente do que um UV bom sem reflexão. A autoavaliação é o ponto de partida da crítica, não um teste. Distribuir o formulário nos últimos 5 min do 1º encontro.</a:t>
+              <a:t>Notas: Amarrar a mini aula. Cada item volta aplicado na produção em estúdio. Não reler tudo — apontar a conexão com o próximo passo: a demonstração no asset real.</a:t>
             </a:r>
             <a:endParaRPr lang="en-US" dirty="0"/>
           </a:p>
@@ -999,6 +1000,94 @@
 </file>
 
 <file path=ppt/notesSlides/notesSlide15.xml><?xml version="1.0" encoding="utf-8"?>
+<p:notes xmlns:a="http://schemas.openxmlformats.org/drawingml/2006/main" xmlns:r="http://schemas.openxmlformats.org/officeDocument/2006/relationships" xmlns:p="http://schemas.openxmlformats.org/presentationml/2006/main">
+  <p:cSld>
+    <p:spTree>
+      <p:nvGrpSpPr>
+        <p:cNvPr id="1" name=""/>
+        <p:cNvGrpSpPr/>
+        <p:nvPr/>
+      </p:nvGrpSpPr>
+      <p:grpSpPr>
+        <a:xfrm>
+          <a:off x="0" y="0"/>
+          <a:ext cx="0" cy="0"/>
+          <a:chOff x="0" y="0"/>
+          <a:chExt cx="0" cy="0"/>
+        </a:xfrm>
+      </p:grpSpPr>
+      <p:sp>
+        <p:nvSpPr>
+          <p:cNvPr id="2" name="Slide Image Placeholder 1"/>
+          <p:cNvSpPr>
+            <a:spLocks noGrp="1" noRot="1" noChangeAspect="1"/>
+          </p:cNvSpPr>
+          <p:nvPr>
+            <p:ph type="sldImg"/>
+          </p:nvPr>
+        </p:nvSpPr>
+        <p:spPr/>
+      </p:sp>
+      <p:sp>
+        <p:nvSpPr>
+          <p:cNvPr id="3" name="Notes Placeholder 2"/>
+          <p:cNvSpPr>
+            <a:spLocks noGrp="1"/>
+          </p:cNvSpPr>
+          <p:nvPr>
+            <p:ph type="body" idx="1"/>
+          </p:nvPr>
+        </p:nvSpPr>
+        <p:spPr/>
+        <p:txBody>
+          <a:bodyPr/>
+          <a:lstStyle/>
+          <a:p>
+            <a:r>
+              <a:rPr lang="en-US" dirty="0"/>
+              <a:t>Notas: Reduzir a ansiedade da primeira crítica formal. Deixar claro: um UV com problemas + boa explicação vale mais pedagogicamente do que um UV bom sem reflexão. A autoavaliação é o ponto de partida da crítica, não um teste. Distribuir o formulário nos últimos 5 min do 1º encontro.</a:t>
+            </a:r>
+            <a:endParaRPr lang="en-US" dirty="0"/>
+          </a:p>
+        </p:txBody>
+      </p:sp>
+      <p:sp>
+        <p:nvSpPr>
+          <p:cNvPr id="4" name="Slide Number Placeholder 3"/>
+          <p:cNvSpPr>
+            <a:spLocks noGrp="1"/>
+          </p:cNvSpPr>
+          <p:nvPr>
+            <p:ph type="sldNum" sz="quarter" idx="10"/>
+          </p:nvPr>
+        </p:nvSpPr>
+        <p:spPr/>
+        <p:txBody>
+          <a:bodyPr/>
+          <a:lstStyle/>
+          <a:p>
+            <a:fld id="{F7021451-1387-4CA6-816F-3879F97B5CBC}" type="slidenum">
+              <a:rPr lang="en-US"/>
+              <a:t>15</a:t>
+            </a:fld>
+            <a:endParaRPr lang="en-US"/>
+          </a:p>
+        </p:txBody>
+      </p:sp>
+    </p:spTree>
+    <p:extLst>
+      <p:ext uri="{BB962C8B-B14F-4D97-AF65-F5344CB8AC3E}">
+        <p14:creationId xmlns:p14="http://schemas.microsoft.com/office/powerpoint/2010/main" val="1024086991"/>
+      </p:ext>
+    </p:extLst>
+  </p:cSld>
+  <p:clrMapOvr>
+    <a:masterClrMapping/>
+  </p:clrMapOvr>
+</p:notes>
+</file>
+
+<file path=ppt/notesSlides/notesSlide16.xml><?xml version="1.0" encoding="utf-8"?>
 <p:notes xmlns:a="http://schemas.openxmlformats.org/drawingml/2006/main" xmlns:r="http://schemas.openxmlformats.org/officeDocument/2006/relationships" xmlns:p="http://schemas.openxmlformats.org/presentationml/2006/main">
   <p:cSld>
     <p:spTree>
@@ -1071,7 +1160,7 @@
           <a:p>
             <a:fld id="{F7021451-1387-4CA6-816F-3879F97B5CBC}" type="slidenum">
               <a:rPr lang="en-US"/>
-              <a:t>15</a:t>
+              <a:t>16</a:t>
             </a:fld>
             <a:endParaRPr lang="en-US"/>
           </a:p>
@@ -2346,6 +2435,45 @@
 <file path=ppt/slides/slide15.xml><?xml version="1.0" encoding="utf-8"?>
 <p:sld xmlns:a="http://schemas.openxmlformats.org/drawingml/2006/main" xmlns:r="http://schemas.openxmlformats.org/officeDocument/2006/relationships" xmlns:p="http://schemas.openxmlformats.org/presentationml/2006/main">
   <p:cSld name="Slide 15">
+    <p:bg>
+      <p:bgPr>
+        <a:blipFill dpi="0" rotWithShape="1">
+          <a:blip r:embed="rId1">
+            <a:lum/>
+          </a:blip>
+          <a:srcRect/>
+          <a:stretch>
+            <a:fillRect/>
+          </a:stretch>
+        </a:blipFill>
+        <a:effectLst/>
+      </p:bgPr>
+    </p:bg>
+    <p:spTree>
+      <p:nvGrpSpPr>
+        <p:cNvPr id="1" name=""/>
+        <p:cNvGrpSpPr/>
+        <p:nvPr/>
+      </p:nvGrpSpPr>
+      <p:grpSpPr>
+        <a:xfrm>
+          <a:off x="0" y="0"/>
+          <a:ext cx="0" cy="0"/>
+          <a:chOff x="0" y="0"/>
+          <a:chExt cx="0" cy="0"/>
+        </a:xfrm>
+      </p:grpSpPr>
+    </p:spTree>
+  </p:cSld>
+  <p:clrMapOvr>
+    <a:masterClrMapping/>
+  </p:clrMapOvr>
+</p:sld>
+</file>
+
+<file path=ppt/slides/slide16.xml><?xml version="1.0" encoding="utf-8"?>
+<p:sld xmlns:a="http://schemas.openxmlformats.org/drawingml/2006/main" xmlns:r="http://schemas.openxmlformats.org/officeDocument/2006/relationships" xmlns:p="http://schemas.openxmlformats.org/presentationml/2006/main">
+  <p:cSld name="Slide 16">
     <p:bg>
       <p:bgPr>
         <a:blipFill dpi="0" rotWithShape="1">

--- a/Slides/Semana 3/semana_3_slides.pptx
+++ b/Slides/Semana 3/semana_3_slides.pptx
@@ -21,9 +21,17 @@
     <p:sldId id="269" r:id="rId15"/>
     <p:sldId id="270" r:id="rId16"/>
     <p:sldId id="271" r:id="rId17"/>
+    <p:sldId id="272" r:id="rId18"/>
+    <p:sldId id="273" r:id="rId19"/>
+    <p:sldId id="274" r:id="rId20"/>
+    <p:sldId id="275" r:id="rId21"/>
+    <p:sldId id="276" r:id="rId22"/>
+    <p:sldId id="277" r:id="rId23"/>
+    <p:sldId id="278" r:id="rId24"/>
+    <p:sldId id="279" r:id="rId25"/>
   </p:sldIdLst>
   <p:notesMasterIdLst>
-    <p:notesMasterId r:id="rId18"/>
+    <p:notesMasterId r:id="rId26"/>
   </p:notesMasterIdLst>
   <p:sldSz cx="12192000" cy="6858000"/>
   <p:notesSz cx="6858000" cy="12192000"/>
@@ -517,7 +525,7 @@
           <a:p>
             <a:r>
               <a:rPr lang="en-US" dirty="0"/>
-              <a:t>Notas: Abertura da mini aula (20 min). Não é tutorial — é construir o raciocínio de POSICIONAMENTO de seam antes de abrir o Blender na demonstração. Lembrar que esta é a primeira vez que a turma trabalha em um asset REAL do kit modular, não em objeto de prática. E é a primeira CRÍTICA FORMAL da disciplina.</a:t>
+              <a:t>Notas: Abrir marcando a virada da aula: até aqui o tema era "ideia em amadurecimento" (Semana 1) e a ferramenta era só técnica, sem tema (Semana 2). Hoje isso muda — ao final da aula, tema e Hero Asset deixam de ser hipótese e passam a ser dados do projeto.</a:t>
             </a:r>
             <a:endParaRPr lang="en-US" dirty="0"/>
           </a:p>
@@ -605,7 +613,7 @@
           <a:p>
             <a:r>
               <a:rPr lang="en-US" dirty="0"/>
-              <a:t>Notas: Diagrama para situar o seam dentro do pipeline da semana. Mostrar que Unwrap é sempre o comando DEPOIS de marcar seam — não Smart UV. Criar o hábito verbal: "marcou seam → Unwrap".</a:t>
+              <a:t>Notas: Um cubo texturizado não prova nada; uma arquitetura inteira não é um Hero Asset, é o Kit Modular inteiro. O ponto de equilíbrio é o que Modelagem 3D e Level Design consegue modelar em uma semana.</a:t>
             </a:r>
             <a:endParaRPr lang="en-US" dirty="0"/>
           </a:p>
@@ -693,7 +701,7 @@
           <a:p>
             <a:r>
               <a:rPr lang="en-US" dirty="0"/>
-              <a:t>Notas: Evitar demonizar o Smart UV Project — ele tem lugar. A decisão é de contexto: quanto mais visível e detalhado o asset, mais o controle manual se justifica. Conectar diretamente à entrega desta semana.</a:t>
+              <a:t>Notas: Ligar diretamente ao Critério 2 (Direção Artística) da Rubrica Mestre, que exige coerência entre as camadas do kit a partir da Semana 10. A escolha de hoje já condiciona essa nota futura.</a:t>
             </a:r>
             <a:endParaRPr lang="en-US" dirty="0"/>
           </a:p>
@@ -781,7 +789,7 @@
           <a:p>
             <a:r>
               <a:rPr lang="en-US" dirty="0"/>
-              <a:t>Notas: Os três erros mais frequentes da semana. O primeiro é técnico (menu), o segundo é de critério (visibilidade), o terceiro é de excesso (medo de distorção). Fixar cada um com a solução correspondente durante a demo e o estúdio.</a:t>
+              <a:t>Notas: Pergunta de checagem para repetir circulando no estúdio. Vale escrever no quadro, no mesmo espírito da pergunta de checagem da Semana 1.</a:t>
             </a:r>
             <a:endParaRPr lang="en-US" dirty="0"/>
           </a:p>
@@ -869,7 +877,7 @@
           <a:p>
             <a:r>
               <a:rPr lang="en-US" dirty="0"/>
-              <a:t>Notas: Contextualizar o valor profissional. Seam placement mal feito é um dos primeiros pontos observados em qualquer review técnico de asset, independente da qualidade da textura aplicada. Amarra à CF1 desta semana (C3 avaliado pela primeira vez): o padrão de exigência técnica que começa aqui é o mesmo cobrado profissionalmente.</a:t>
+              <a:t>Notas: Um moodboard genérico ("fantasia medieval") não orienta escolha nenhuma. Um moodboard específico já sugere naturalmente qual peça vira o Hero Asset — o moodboard bom faz o trabalho de escolha ficar mais fácil, não mais difícil.</a:t>
             </a:r>
             <a:endParaRPr lang="en-US" dirty="0"/>
           </a:p>
@@ -957,7 +965,7 @@
           <a:p>
             <a:r>
               <a:rPr lang="en-US" dirty="0"/>
-              <a:t>Notas: Amarrar a mini aula. Cada item volta aplicado na produção em estúdio. Não reler tudo — apontar a conexão com o próximo passo: a demonstração no asset real.</a:t>
+              <a:t>Notas: Os dois erros mais comuns nesta etapa. Antecipar aqui poupa correção no estúdio. Reforçar a ponte com a Semana 1: "se você não consegue apontar qual dos 5 props está por trás dessa imagem, o recorte ainda está solto."</a:t>
             </a:r>
             <a:endParaRPr lang="en-US" dirty="0"/>
           </a:p>
@@ -1045,7 +1053,7 @@
           <a:p>
             <a:r>
               <a:rPr lang="en-US" dirty="0"/>
-              <a:t>Notas: Reduzir a ansiedade da primeira crítica formal. Deixar claro: um UV com problemas + boa explicação vale mais pedagogicamente do que um UV bom sem reflexão. A autoavaliação é o ponto de partida da crítica, não um teste. Distribuir o formulário nos últimos 5 min do 1º encontro.</a:t>
+              <a:t>Notas: Contextualizar o valor profissional da decisão de hoje. Amarrar a C1 (Processo de Projeto) e C2 (Direção Artística) da Rubrica Mestre — critérios ativos nesta semana, ainda em nível inicial.</a:t>
             </a:r>
             <a:endParaRPr lang="en-US" dirty="0"/>
           </a:p>
@@ -1133,11 +1141,7 @@
           <a:p>
             <a:r>
               <a:rPr lang="en-US" dirty="0"/>
-              <a:t>Notas: Transição para a demonstração de 20 min. Mesmo layout dividido da Semana 2: Viewport 3D à esquerda, UV Editor à direita. Sequência: Smart UV como linha de base → desfazer → marcar seams → Unwrap → comparar checker → organizar islands. Mostrar de propósito um seam mal posicionado para reforçar o critério visual.
-FIGURA (produzir) — assets/demo_layout_semana03.webp
-Objetivo: orientar o layout de tela (Viewport 3D + UV Editor) e antecipar o resultado esperado da demonstração com o prop do kit.
-Descrição: captura do Blender com janela dividida — à esquerda o prop (barril/caixote) em Material Preview com checkerboard e seams vermelhos visíveis; à direita o UV Editor com as islands organizadas dentro do quadrado 0–1.
-Como produzir: no Blender, montar o layout dividido, marcar os seams do prop, executar Unwrap, carregar o checkerboard e organizar as islands. Capturar a tela cheia com os dois painéis visíveis.</a:t>
+              <a:t>Notas: Fechar a mini aula amarrando os conceitos. Apontar que a Semana 4 (primeira Crítica Formal) parte diretamente do que for decidido hoje.</a:t>
             </a:r>
             <a:endParaRPr lang="en-US" dirty="0"/>
           </a:p>
@@ -1179,6 +1183,275 @@
 </p:notes>
 </file>
 
+<file path=ppt/notesSlides/notesSlide17.xml><?xml version="1.0" encoding="utf-8"?>
+<p:notes xmlns:a="http://schemas.openxmlformats.org/drawingml/2006/main" xmlns:r="http://schemas.openxmlformats.org/officeDocument/2006/relationships" xmlns:p="http://schemas.openxmlformats.org/presentationml/2006/main">
+  <p:cSld>
+    <p:spTree>
+      <p:nvGrpSpPr>
+        <p:cNvPr id="1" name=""/>
+        <p:cNvGrpSpPr/>
+        <p:nvPr/>
+      </p:nvGrpSpPr>
+      <p:grpSpPr>
+        <a:xfrm>
+          <a:off x="0" y="0"/>
+          <a:ext cx="0" cy="0"/>
+          <a:chOff x="0" y="0"/>
+          <a:chExt cx="0" cy="0"/>
+        </a:xfrm>
+      </p:grpSpPr>
+      <p:sp>
+        <p:nvSpPr>
+          <p:cNvPr id="2" name="Slide Image Placeholder 1"/>
+          <p:cNvSpPr>
+            <a:spLocks noGrp="1" noRot="1" noChangeAspect="1"/>
+          </p:cNvSpPr>
+          <p:nvPr>
+            <p:ph type="sldImg"/>
+          </p:nvPr>
+        </p:nvSpPr>
+        <p:spPr/>
+      </p:sp>
+      <p:sp>
+        <p:nvSpPr>
+          <p:cNvPr id="3" name="Notes Placeholder 2"/>
+          <p:cNvSpPr>
+            <a:spLocks noGrp="1"/>
+          </p:cNvSpPr>
+          <p:nvPr>
+            <p:ph type="body" idx="1"/>
+          </p:nvPr>
+        </p:nvSpPr>
+        <p:spPr/>
+        <p:txBody>
+          <a:bodyPr/>
+          <a:lstStyle/>
+          <a:p>
+            <a:r>
+              <a:rPr lang="en-US" dirty="0"/>
+              <a:t>Notas: Transição para os 20 min de demonstração. Reforçar que a demonstração não abre Blender nem 3D Coat — é a primeira aula inteiramente curatorial do semestre, e isso é proposital: decisão de projeto é etapa distinta de execução técnica.
+[!FIGURA]
+Objetivo didático — Mostrar exemplos concretos de Hero Assets publicados e sua relação direta com um moodboard, para que o estudante veja o padrão de qualidade esperado antes de decidir o próprio.
+Arquivo sugerido — assets/hero_asset_exemplos.webp
+Descrição — Grade de 3 a 4 projetos de referência (ArtStation ou portfólios equivalentes), cada célula mostrando lado a lado um recorte do moodboard original e a peça-chave (Hero Asset) que resultou dele, evidenciando a correspondência de paleta e forma.
+Como produzir — Selecionar 3-4 projetos publicados no ArtStation que exponham claramente o moodboard e o asset final. Capturar as imagens (respeitando os créditos) e montar a grade comparativa no Krita, com um rótulo curto por projeto.</a:t>
+            </a:r>
+            <a:endParaRPr lang="en-US" dirty="0"/>
+          </a:p>
+        </p:txBody>
+      </p:sp>
+      <p:sp>
+        <p:nvSpPr>
+          <p:cNvPr id="4" name="Slide Number Placeholder 3"/>
+          <p:cNvSpPr>
+            <a:spLocks noGrp="1"/>
+          </p:cNvSpPr>
+          <p:nvPr>
+            <p:ph type="sldNum" sz="quarter" idx="10"/>
+          </p:nvPr>
+        </p:nvSpPr>
+        <p:spPr/>
+        <p:txBody>
+          <a:bodyPr/>
+          <a:lstStyle/>
+          <a:p>
+            <a:fld id="{F7021451-1387-4CA6-816F-3879F97B5CBC}" type="slidenum">
+              <a:rPr lang="en-US"/>
+              <a:t>17</a:t>
+            </a:fld>
+            <a:endParaRPr lang="en-US"/>
+          </a:p>
+        </p:txBody>
+      </p:sp>
+    </p:spTree>
+    <p:extLst>
+      <p:ext uri="{BB962C8B-B14F-4D97-AF65-F5344CB8AC3E}">
+        <p14:creationId xmlns:p14="http://schemas.microsoft.com/office/powerpoint/2010/main" val="1024086991"/>
+      </p:ext>
+    </p:extLst>
+  </p:cSld>
+  <p:clrMapOvr>
+    <a:masterClrMapping/>
+  </p:clrMapOvr>
+</p:notes>
+</file>
+
+<file path=ppt/notesSlides/notesSlide18.xml><?xml version="1.0" encoding="utf-8"?>
+<p:notes xmlns:a="http://schemas.openxmlformats.org/drawingml/2006/main" xmlns:r="http://schemas.openxmlformats.org/officeDocument/2006/relationships" xmlns:p="http://schemas.openxmlformats.org/presentationml/2006/main">
+  <p:cSld>
+    <p:spTree>
+      <p:nvGrpSpPr>
+        <p:cNvPr id="1" name=""/>
+        <p:cNvGrpSpPr/>
+        <p:nvPr/>
+      </p:nvGrpSpPr>
+      <p:grpSpPr>
+        <a:xfrm>
+          <a:off x="0" y="0"/>
+          <a:ext cx="0" cy="0"/>
+          <a:chOff x="0" y="0"/>
+          <a:chExt cx="0" cy="0"/>
+        </a:xfrm>
+      </p:grpSpPr>
+      <p:sp>
+        <p:nvSpPr>
+          <p:cNvPr id="2" name="Slide Image Placeholder 1"/>
+          <p:cNvSpPr>
+            <a:spLocks noGrp="1" noRot="1" noChangeAspect="1"/>
+          </p:cNvSpPr>
+          <p:nvPr>
+            <p:ph type="sldImg"/>
+          </p:nvPr>
+        </p:nvSpPr>
+        <p:spPr/>
+      </p:sp>
+      <p:sp>
+        <p:nvSpPr>
+          <p:cNvPr id="3" name="Notes Placeholder 2"/>
+          <p:cNvSpPr>
+            <a:spLocks noGrp="1"/>
+          </p:cNvSpPr>
+          <p:nvPr>
+            <p:ph type="body" idx="1"/>
+          </p:nvPr>
+        </p:nvSpPr>
+        <p:spPr/>
+        <p:txBody>
+          <a:bodyPr/>
+          <a:lstStyle/>
+          <a:p>
+            <a:r>
+              <a:rPr lang="en-US" dirty="0"/>
+              <a:t>Notas: Divisória entre a mini aula e o estúdio. Os slides a seguir ficam projetados durante a produção — servem de consigna e timebox visíveis para a turma, não são material de exposição. Apresentar cada um só no momento em que a etapa correspondente começa.</a:t>
+            </a:r>
+            <a:endParaRPr lang="en-US" dirty="0"/>
+          </a:p>
+        </p:txBody>
+      </p:sp>
+      <p:sp>
+        <p:nvSpPr>
+          <p:cNvPr id="4" name="Slide Number Placeholder 3"/>
+          <p:cNvSpPr>
+            <a:spLocks noGrp="1"/>
+          </p:cNvSpPr>
+          <p:nvPr>
+            <p:ph type="sldNum" sz="quarter" idx="10"/>
+          </p:nvPr>
+        </p:nvSpPr>
+        <p:spPr/>
+        <p:txBody>
+          <a:bodyPr/>
+          <a:lstStyle/>
+          <a:p>
+            <a:fld id="{F7021451-1387-4CA6-816F-3879F97B5CBC}" type="slidenum">
+              <a:rPr lang="en-US"/>
+              <a:t>18</a:t>
+            </a:fld>
+            <a:endParaRPr lang="en-US"/>
+          </a:p>
+        </p:txBody>
+      </p:sp>
+    </p:spTree>
+    <p:extLst>
+      <p:ext uri="{BB962C8B-B14F-4D97-AF65-F5344CB8AC3E}">
+        <p14:creationId xmlns:p14="http://schemas.microsoft.com/office/powerpoint/2010/main" val="1024086991"/>
+      </p:ext>
+    </p:extLst>
+  </p:cSld>
+  <p:clrMapOvr>
+    <a:masterClrMapping/>
+  </p:clrMapOvr>
+</p:notes>
+</file>
+
+<file path=ppt/notesSlides/notesSlide19.xml><?xml version="1.0" encoding="utf-8"?>
+<p:notes xmlns:a="http://schemas.openxmlformats.org/drawingml/2006/main" xmlns:r="http://schemas.openxmlformats.org/officeDocument/2006/relationships" xmlns:p="http://schemas.openxmlformats.org/presentationml/2006/main">
+  <p:cSld>
+    <p:spTree>
+      <p:nvGrpSpPr>
+        <p:cNvPr id="1" name=""/>
+        <p:cNvGrpSpPr/>
+        <p:nvPr/>
+      </p:nvGrpSpPr>
+      <p:grpSpPr>
+        <a:xfrm>
+          <a:off x="0" y="0"/>
+          <a:ext cx="0" cy="0"/>
+          <a:chOff x="0" y="0"/>
+          <a:chExt cx="0" cy="0"/>
+        </a:xfrm>
+      </p:grpSpPr>
+      <p:sp>
+        <p:nvSpPr>
+          <p:cNvPr id="2" name="Slide Image Placeholder 1"/>
+          <p:cNvSpPr>
+            <a:spLocks noGrp="1" noRot="1" noChangeAspect="1"/>
+          </p:cNvSpPr>
+          <p:nvPr>
+            <p:ph type="sldImg"/>
+          </p:nvPr>
+        </p:nvSpPr>
+        <p:spPr/>
+      </p:sp>
+      <p:sp>
+        <p:nvSpPr>
+          <p:cNvPr id="3" name="Notes Placeholder 2"/>
+          <p:cNvSpPr>
+            <a:spLocks noGrp="1"/>
+          </p:cNvSpPr>
+          <p:nvPr>
+            <p:ph type="body" idx="1"/>
+          </p:nvPr>
+        </p:nvSpPr>
+        <p:spPr/>
+        <p:txBody>
+          <a:bodyPr/>
+          <a:lstStyle/>
+          <a:p>
+            <a:r>
+              <a:rPr lang="en-US" dirty="0"/>
+              <a:t>Notas: Encontro 1. Circular perguntando: "esse moodboard me diz um lugar específico, ou poderia ser qualquer fantasia genérica?" Identificar quem chega com moodboard disperso — vai precisar de atenção prioritária no Encontro 2.</a:t>
+            </a:r>
+            <a:endParaRPr lang="en-US" dirty="0"/>
+          </a:p>
+        </p:txBody>
+      </p:sp>
+      <p:sp>
+        <p:nvSpPr>
+          <p:cNvPr id="4" name="Slide Number Placeholder 3"/>
+          <p:cNvSpPr>
+            <a:spLocks noGrp="1"/>
+          </p:cNvSpPr>
+          <p:nvPr>
+            <p:ph type="sldNum" sz="quarter" idx="10"/>
+          </p:nvPr>
+        </p:nvSpPr>
+        <p:spPr/>
+        <p:txBody>
+          <a:bodyPr/>
+          <a:lstStyle/>
+          <a:p>
+            <a:fld id="{F7021451-1387-4CA6-816F-3879F97B5CBC}" type="slidenum">
+              <a:rPr lang="en-US"/>
+              <a:t>19</a:t>
+            </a:fld>
+            <a:endParaRPr lang="en-US"/>
+          </a:p>
+        </p:txBody>
+      </p:sp>
+    </p:spTree>
+    <p:extLst>
+      <p:ext uri="{BB962C8B-B14F-4D97-AF65-F5344CB8AC3E}">
+        <p14:creationId xmlns:p14="http://schemas.microsoft.com/office/powerpoint/2010/main" val="1024086991"/>
+      </p:ext>
+    </p:extLst>
+  </p:cSld>
+  <p:clrMapOvr>
+    <a:masterClrMapping/>
+  </p:clrMapOvr>
+</p:notes>
+</file>
+
 <file path=ppt/notesSlides/notesSlide2.xml><?xml version="1.0" encoding="utf-8"?>
 <p:notes xmlns:a="http://schemas.openxmlformats.org/drawingml/2006/main" xmlns:r="http://schemas.openxmlformats.org/officeDocument/2006/relationships" xmlns:p="http://schemas.openxmlformats.org/presentationml/2006/main">
   <p:cSld>
@@ -1225,7 +1498,7 @@
           <a:p>
             <a:r>
               <a:rPr lang="en-US" dirty="0"/>
-              <a:t>Notas: Ler rápido. Cada objetivo volta ao longo da aula. O foco é o RACIOCÍNIO de corte, não a otimização de layout (isso é Semana 4). Não falar em texel density numérico nem empacotamento automático hoje.</a:t>
+              <a:t>Notas: Recapitular em uma frase, sem reabrir conteúdo técnico de UV nem repetir a dinâmica de props da Semana 1 — isso já foi feito. O objetivo aqui é só situar o estudante no fluxo, não reensinar.</a:t>
             </a:r>
             <a:endParaRPr lang="en-US" dirty="0"/>
           </a:p>
@@ -1267,6 +1540,448 @@
 </p:notes>
 </file>
 
+<file path=ppt/notesSlides/notesSlide20.xml><?xml version="1.0" encoding="utf-8"?>
+<p:notes xmlns:a="http://schemas.openxmlformats.org/drawingml/2006/main" xmlns:r="http://schemas.openxmlformats.org/officeDocument/2006/relationships" xmlns:p="http://schemas.openxmlformats.org/presentationml/2006/main">
+  <p:cSld>
+    <p:spTree>
+      <p:nvGrpSpPr>
+        <p:cNvPr id="1" name=""/>
+        <p:cNvGrpSpPr/>
+        <p:nvPr/>
+      </p:nvGrpSpPr>
+      <p:grpSpPr>
+        <a:xfrm>
+          <a:off x="0" y="0"/>
+          <a:ext cx="0" cy="0"/>
+          <a:chOff x="0" y="0"/>
+          <a:chExt cx="0" cy="0"/>
+        </a:xfrm>
+      </p:grpSpPr>
+      <p:sp>
+        <p:nvSpPr>
+          <p:cNvPr id="2" name="Slide Image Placeholder 1"/>
+          <p:cNvSpPr>
+            <a:spLocks noGrp="1" noRot="1" noChangeAspect="1"/>
+          </p:cNvSpPr>
+          <p:nvPr>
+            <p:ph type="sldImg"/>
+          </p:nvPr>
+        </p:nvSpPr>
+        <p:spPr/>
+      </p:sp>
+      <p:sp>
+        <p:nvSpPr>
+          <p:cNvPr id="3" name="Notes Placeholder 2"/>
+          <p:cNvSpPr>
+            <a:spLocks noGrp="1"/>
+          </p:cNvSpPr>
+          <p:nvPr>
+            <p:ph type="body" idx="1"/>
+          </p:nvPr>
+        </p:nvSpPr>
+        <p:spPr/>
+        <p:txBody>
+          <a:bodyPr/>
+          <a:lstStyle/>
+          <a:p>
+            <a:r>
+              <a:rPr lang="en-US" dirty="0"/>
+              <a:t>Notas: Não force a decisão final ainda — o objetivo do Encontro 1 é chegar a candidatos justificáveis. Perguntar: "se Modelagem 3D e Level Design tivesse que modelar isso essa semana, dá tempo?"</a:t>
+            </a:r>
+            <a:endParaRPr lang="en-US" dirty="0"/>
+          </a:p>
+        </p:txBody>
+      </p:sp>
+      <p:sp>
+        <p:nvSpPr>
+          <p:cNvPr id="4" name="Slide Number Placeholder 3"/>
+          <p:cNvSpPr>
+            <a:spLocks noGrp="1"/>
+          </p:cNvSpPr>
+          <p:nvPr>
+            <p:ph type="sldNum" sz="quarter" idx="10"/>
+          </p:nvPr>
+        </p:nvSpPr>
+        <p:spPr/>
+        <p:txBody>
+          <a:bodyPr/>
+          <a:lstStyle/>
+          <a:p>
+            <a:fld id="{F7021451-1387-4CA6-816F-3879F97B5CBC}" type="slidenum">
+              <a:rPr lang="en-US"/>
+              <a:t>20</a:t>
+            </a:fld>
+            <a:endParaRPr lang="en-US"/>
+          </a:p>
+        </p:txBody>
+      </p:sp>
+    </p:spTree>
+    <p:extLst>
+      <p:ext uri="{BB962C8B-B14F-4D97-AF65-F5344CB8AC3E}">
+        <p14:creationId xmlns:p14="http://schemas.microsoft.com/office/powerpoint/2010/main" val="1024086991"/>
+      </p:ext>
+    </p:extLst>
+  </p:cSld>
+  <p:clrMapOvr>
+    <a:masterClrMapping/>
+  </p:clrMapOvr>
+</p:notes>
+</file>
+
+<file path=ppt/notesSlides/notesSlide21.xml><?xml version="1.0" encoding="utf-8"?>
+<p:notes xmlns:a="http://schemas.openxmlformats.org/drawingml/2006/main" xmlns:r="http://schemas.openxmlformats.org/officeDocument/2006/relationships" xmlns:p="http://schemas.openxmlformats.org/presentationml/2006/main">
+  <p:cSld>
+    <p:spTree>
+      <p:nvGrpSpPr>
+        <p:cNvPr id="1" name=""/>
+        <p:cNvGrpSpPr/>
+        <p:nvPr/>
+      </p:nvGrpSpPr>
+      <p:grpSpPr>
+        <a:xfrm>
+          <a:off x="0" y="0"/>
+          <a:ext cx="0" cy="0"/>
+          <a:chOff x="0" y="0"/>
+          <a:chExt cx="0" cy="0"/>
+        </a:xfrm>
+      </p:grpSpPr>
+      <p:sp>
+        <p:nvSpPr>
+          <p:cNvPr id="2" name="Slide Image Placeholder 1"/>
+          <p:cNvSpPr>
+            <a:spLocks noGrp="1" noRot="1" noChangeAspect="1"/>
+          </p:cNvSpPr>
+          <p:nvPr>
+            <p:ph type="sldImg"/>
+          </p:nvPr>
+        </p:nvSpPr>
+        <p:spPr/>
+      </p:sp>
+      <p:sp>
+        <p:nvSpPr>
+          <p:cNvPr id="3" name="Notes Placeholder 2"/>
+          <p:cNvSpPr>
+            <a:spLocks noGrp="1"/>
+          </p:cNvSpPr>
+          <p:nvPr>
+            <p:ph type="body" idx="1"/>
+          </p:nvPr>
+        </p:nvSpPr>
+        <p:spPr/>
+        <p:txBody>
+          <a:bodyPr/>
+          <a:lstStyle/>
+          <a:p>
+            <a:r>
+              <a:rPr lang="en-US" dirty="0"/>
+              <a:t>Notas: Feedback rápido antes da decisão final, que fecha no Encontro 2. Não é avaliado — é ensaio da roda de temas que vem a seguir.</a:t>
+            </a:r>
+            <a:endParaRPr lang="en-US" dirty="0"/>
+          </a:p>
+        </p:txBody>
+      </p:sp>
+      <p:sp>
+        <p:nvSpPr>
+          <p:cNvPr id="4" name="Slide Number Placeholder 3"/>
+          <p:cNvSpPr>
+            <a:spLocks noGrp="1"/>
+          </p:cNvSpPr>
+          <p:nvPr>
+            <p:ph type="sldNum" sz="quarter" idx="10"/>
+          </p:nvPr>
+        </p:nvSpPr>
+        <p:spPr/>
+        <p:txBody>
+          <a:bodyPr/>
+          <a:lstStyle/>
+          <a:p>
+            <a:fld id="{F7021451-1387-4CA6-816F-3879F97B5CBC}" type="slidenum">
+              <a:rPr lang="en-US"/>
+              <a:t>21</a:t>
+            </a:fld>
+            <a:endParaRPr lang="en-US"/>
+          </a:p>
+        </p:txBody>
+      </p:sp>
+    </p:spTree>
+    <p:extLst>
+      <p:ext uri="{BB962C8B-B14F-4D97-AF65-F5344CB8AC3E}">
+        <p14:creationId xmlns:p14="http://schemas.microsoft.com/office/powerpoint/2010/main" val="1024086991"/>
+      </p:ext>
+    </p:extLst>
+  </p:cSld>
+  <p:clrMapOvr>
+    <a:masterClrMapping/>
+  </p:clrMapOvr>
+</p:notes>
+</file>
+
+<file path=ppt/notesSlides/notesSlide22.xml><?xml version="1.0" encoding="utf-8"?>
+<p:notes xmlns:a="http://schemas.openxmlformats.org/drawingml/2006/main" xmlns:r="http://schemas.openxmlformats.org/officeDocument/2006/relationships" xmlns:p="http://schemas.openxmlformats.org/presentationml/2006/main">
+  <p:cSld>
+    <p:spTree>
+      <p:nvGrpSpPr>
+        <p:cNvPr id="1" name=""/>
+        <p:cNvGrpSpPr/>
+        <p:nvPr/>
+      </p:nvGrpSpPr>
+      <p:grpSpPr>
+        <a:xfrm>
+          <a:off x="0" y="0"/>
+          <a:ext cx="0" cy="0"/>
+          <a:chOff x="0" y="0"/>
+          <a:chExt cx="0" cy="0"/>
+        </a:xfrm>
+      </p:grpSpPr>
+      <p:sp>
+        <p:nvSpPr>
+          <p:cNvPr id="2" name="Slide Image Placeholder 1"/>
+          <p:cNvSpPr>
+            <a:spLocks noGrp="1" noRot="1" noChangeAspect="1"/>
+          </p:cNvSpPr>
+          <p:nvPr>
+            <p:ph type="sldImg"/>
+          </p:nvPr>
+        </p:nvSpPr>
+        <p:spPr/>
+      </p:sp>
+      <p:sp>
+        <p:nvSpPr>
+          <p:cNvPr id="3" name="Notes Placeholder 2"/>
+          <p:cNvSpPr>
+            <a:spLocks noGrp="1"/>
+          </p:cNvSpPr>
+          <p:nvPr>
+            <p:ph type="body" idx="1"/>
+          </p:nvPr>
+        </p:nvSpPr>
+        <p:spPr/>
+        <p:txBody>
+          <a:bodyPr/>
+          <a:lstStyle/>
+          <a:p>
+            <a:r>
+              <a:rPr lang="en-US" dirty="0"/>
+              <a:t>Notas: Abertura do Encontro 2. Timebox rígido — usar cronômetro visível. Perguntas da turma sempre voltando aos três critérios: "isso está legível?", "isso é viável em uma semana de modelagem?", "isso puxa material para o resto do kit?"
+Fechamento da roda (3-5 min): sistematizar padrões observados na turma — temas que se repetem, riscos comuns (escopo grande demais, moodboard genérico) — e afirmar que a decisão final acontece agora, na produção em estúdio que segue.</a:t>
+            </a:r>
+            <a:endParaRPr lang="en-US" dirty="0"/>
+          </a:p>
+        </p:txBody>
+      </p:sp>
+      <p:sp>
+        <p:nvSpPr>
+          <p:cNvPr id="4" name="Slide Number Placeholder 3"/>
+          <p:cNvSpPr>
+            <a:spLocks noGrp="1"/>
+          </p:cNvSpPr>
+          <p:nvPr>
+            <p:ph type="sldNum" sz="quarter" idx="10"/>
+          </p:nvPr>
+        </p:nvSpPr>
+        <p:spPr/>
+        <p:txBody>
+          <a:bodyPr/>
+          <a:lstStyle/>
+          <a:p>
+            <a:fld id="{F7021451-1387-4CA6-816F-3879F97B5CBC}" type="slidenum">
+              <a:rPr lang="en-US"/>
+              <a:t>22</a:t>
+            </a:fld>
+            <a:endParaRPr lang="en-US"/>
+          </a:p>
+        </p:txBody>
+      </p:sp>
+    </p:spTree>
+    <p:extLst>
+      <p:ext uri="{BB962C8B-B14F-4D97-AF65-F5344CB8AC3E}">
+        <p14:creationId xmlns:p14="http://schemas.microsoft.com/office/powerpoint/2010/main" val="1024086991"/>
+      </p:ext>
+    </p:extLst>
+  </p:cSld>
+  <p:clrMapOvr>
+    <a:masterClrMapping/>
+  </p:clrMapOvr>
+</p:notes>
+</file>
+
+<file path=ppt/notesSlides/notesSlide23.xml><?xml version="1.0" encoding="utf-8"?>
+<p:notes xmlns:a="http://schemas.openxmlformats.org/drawingml/2006/main" xmlns:r="http://schemas.openxmlformats.org/officeDocument/2006/relationships" xmlns:p="http://schemas.openxmlformats.org/presentationml/2006/main">
+  <p:cSld>
+    <p:spTree>
+      <p:nvGrpSpPr>
+        <p:cNvPr id="1" name=""/>
+        <p:cNvGrpSpPr/>
+        <p:nvPr/>
+      </p:nvGrpSpPr>
+      <p:grpSpPr>
+        <a:xfrm>
+          <a:off x="0" y="0"/>
+          <a:ext cx="0" cy="0"/>
+          <a:chOff x="0" y="0"/>
+          <a:chExt cx="0" cy="0"/>
+        </a:xfrm>
+      </p:grpSpPr>
+      <p:sp>
+        <p:nvSpPr>
+          <p:cNvPr id="2" name="Slide Image Placeholder 1"/>
+          <p:cNvSpPr>
+            <a:spLocks noGrp="1" noRot="1" noChangeAspect="1"/>
+          </p:cNvSpPr>
+          <p:nvPr>
+            <p:ph type="sldImg"/>
+          </p:nvPr>
+        </p:nvSpPr>
+        <p:spPr/>
+      </p:sp>
+      <p:sp>
+        <p:nvSpPr>
+          <p:cNvPr id="3" name="Notes Placeholder 2"/>
+          <p:cNvSpPr>
+            <a:spLocks noGrp="1"/>
+          </p:cNvSpPr>
+          <p:nvPr>
+            <p:ph type="body" idx="1"/>
+          </p:nvPr>
+        </p:nvSpPr>
+        <p:spPr/>
+        <p:txBody>
+          <a:bodyPr/>
+          <a:lstStyle/>
+          <a:p>
+            <a:r>
+              <a:rPr lang="en-US" dirty="0"/>
+              <a:t>Notas: Nomear os arquivos como `[Nome]_Moodboard_Semana03` e `[Nome]_HeroAsset_Justificativa_Semana03`. Prioridade de atenção: estudantes que chegaram ao Encontro 2 com moodboard ainda disperso, e estudantes em dúvida entre dois candidatos (usar os três critérios como desempate, não a preferência estética isolada).
+Não permitir que a decisão fique em aberto além deste encontro — a Semana 4 depende de Modelagem 3D e Level Design já ter um briefing fechado.</a:t>
+            </a:r>
+            <a:endParaRPr lang="en-US" dirty="0"/>
+          </a:p>
+        </p:txBody>
+      </p:sp>
+      <p:sp>
+        <p:nvSpPr>
+          <p:cNvPr id="4" name="Slide Number Placeholder 3"/>
+          <p:cNvSpPr>
+            <a:spLocks noGrp="1"/>
+          </p:cNvSpPr>
+          <p:nvPr>
+            <p:ph type="sldNum" sz="quarter" idx="10"/>
+          </p:nvPr>
+        </p:nvSpPr>
+        <p:spPr/>
+        <p:txBody>
+          <a:bodyPr/>
+          <a:lstStyle/>
+          <a:p>
+            <a:fld id="{F7021451-1387-4CA6-816F-3879F97B5CBC}" type="slidenum">
+              <a:rPr lang="en-US"/>
+              <a:t>23</a:t>
+            </a:fld>
+            <a:endParaRPr lang="en-US"/>
+          </a:p>
+        </p:txBody>
+      </p:sp>
+    </p:spTree>
+    <p:extLst>
+      <p:ext uri="{BB962C8B-B14F-4D97-AF65-F5344CB8AC3E}">
+        <p14:creationId xmlns:p14="http://schemas.microsoft.com/office/powerpoint/2010/main" val="1024086991"/>
+      </p:ext>
+    </p:extLst>
+  </p:cSld>
+  <p:clrMapOvr>
+    <a:masterClrMapping/>
+  </p:clrMapOvr>
+</p:notes>
+</file>
+
+<file path=ppt/notesSlides/notesSlide24.xml><?xml version="1.0" encoding="utf-8"?>
+<p:notes xmlns:a="http://schemas.openxmlformats.org/drawingml/2006/main" xmlns:r="http://schemas.openxmlformats.org/officeDocument/2006/relationships" xmlns:p="http://schemas.openxmlformats.org/presentationml/2006/main">
+  <p:cSld>
+    <p:spTree>
+      <p:nvGrpSpPr>
+        <p:cNvPr id="1" name=""/>
+        <p:cNvGrpSpPr/>
+        <p:nvPr/>
+      </p:nvGrpSpPr>
+      <p:grpSpPr>
+        <a:xfrm>
+          <a:off x="0" y="0"/>
+          <a:ext cx="0" cy="0"/>
+          <a:chOff x="0" y="0"/>
+          <a:chExt cx="0" cy="0"/>
+        </a:xfrm>
+      </p:grpSpPr>
+      <p:sp>
+        <p:nvSpPr>
+          <p:cNvPr id="2" name="Slide Image Placeholder 1"/>
+          <p:cNvSpPr>
+            <a:spLocks noGrp="1" noRot="1" noChangeAspect="1"/>
+          </p:cNvSpPr>
+          <p:nvPr>
+            <p:ph type="sldImg"/>
+          </p:nvPr>
+        </p:nvSpPr>
+        <p:spPr/>
+      </p:sp>
+      <p:sp>
+        <p:nvSpPr>
+          <p:cNvPr id="3" name="Notes Placeholder 2"/>
+          <p:cNvSpPr>
+            <a:spLocks noGrp="1"/>
+          </p:cNvSpPr>
+          <p:nvPr>
+            <p:ph type="body" idx="1"/>
+          </p:nvPr>
+        </p:nvSpPr>
+        <p:spPr/>
+        <p:txBody>
+          <a:bodyPr/>
+          <a:lstStyle/>
+          <a:p>
+            <a:r>
+              <a:rPr lang="en-US" dirty="0"/>
+              <a:t>Notas: Fechamento (10 min): síntese rápida + reflexão individual registrada ("Escolhi este Hero Asset porque ___. O que mais me preocupa nessa escolha é ___.") + ponte para a Semana 4: "vocês recebem o Hero Asset modelado e abrem o UV dele de verdade — primeira Crítica Formal do semestre, com rubrica e autoavaliação. Revisem o Nível 3 do Critério 3 antes de vir para a aula."</a:t>
+            </a:r>
+            <a:endParaRPr lang="en-US" dirty="0"/>
+          </a:p>
+        </p:txBody>
+      </p:sp>
+      <p:sp>
+        <p:nvSpPr>
+          <p:cNvPr id="4" name="Slide Number Placeholder 3"/>
+          <p:cNvSpPr>
+            <a:spLocks noGrp="1"/>
+          </p:cNvSpPr>
+          <p:nvPr>
+            <p:ph type="sldNum" sz="quarter" idx="10"/>
+          </p:nvPr>
+        </p:nvSpPr>
+        <p:spPr/>
+        <p:txBody>
+          <a:bodyPr/>
+          <a:lstStyle/>
+          <a:p>
+            <a:fld id="{F7021451-1387-4CA6-816F-3879F97B5CBC}" type="slidenum">
+              <a:rPr lang="en-US"/>
+              <a:t>24</a:t>
+            </a:fld>
+            <a:endParaRPr lang="en-US"/>
+          </a:p>
+        </p:txBody>
+      </p:sp>
+    </p:spTree>
+    <p:extLst>
+      <p:ext uri="{BB962C8B-B14F-4D97-AF65-F5344CB8AC3E}">
+        <p14:creationId xmlns:p14="http://schemas.microsoft.com/office/powerpoint/2010/main" val="1024086991"/>
+      </p:ext>
+    </p:extLst>
+  </p:cSld>
+  <p:clrMapOvr>
+    <a:masterClrMapping/>
+  </p:clrMapOvr>
+</p:notes>
+</file>
+
 <file path=ppt/notesSlides/notesSlide3.xml><?xml version="1.0" encoding="utf-8"?>
 <p:notes xmlns:a="http://schemas.openxmlformats.org/drawingml/2006/main" xmlns:r="http://schemas.openxmlformats.org/officeDocument/2006/relationships" xmlns:p="http://schemas.openxmlformats.org/presentationml/2006/main">
   <p:cSld>
@@ -1313,7 +2028,7 @@
           <a:p>
             <a:r>
               <a:rPr lang="en-US" dirty="0"/>
-              <a:t>Notas: Deixar 2–3 respostas da turma antes de prosseguir. Não corrigir — usar as respostas como ponte para a limitação do Smart UV Project. Objetivo: fazer a turma verbalizar que o algoritmo corta em lugares indesejados.</a:t>
+              <a:t>Notas: Ler rápido. Os três primeiros objetivos são cobertos na mini aula e na demonstração; os dois últimos são o trabalho do estúdio de hoje, fechado na roda de temas do Encontro 2.</a:t>
             </a:r>
             <a:endParaRPr lang="en-US" dirty="0"/>
           </a:p>
@@ -1401,7 +2116,7 @@
           <a:p>
             <a:r>
               <a:rPr lang="en-US" dirty="0"/>
-              <a:t>Notas: Este é o pivô conceitual da semana. O algoritmo otimiza por geometria; o artista otimiza por VISIBILIDADE. Reforçar: a costura de uma bota não deve aparecer na frente do personagem — o Smart UV não sabe disso, você sabe.</a:t>
+              <a:t>Notas: Deixar 2–3 respostas da turma antes de nomear o conceito. Não corrigir — usar como ponte direta para a definição de Hero Asset Referência.</a:t>
             </a:r>
             <a:endParaRPr lang="en-US" dirty="0"/>
           </a:p>
@@ -1489,11 +2204,7 @@
           <a:p>
             <a:r>
               <a:rPr lang="en-US" dirty="0"/>
-              <a:t>Notas: Retomar a analogia da caixa da Semana 2 e agora NOMEAR o corte: seam. Fixar que o seam não muda o modelo 3D — só o UV. Mostrar as arestas em vermelho no Viewport.
-FIGURA (produzir) — assets/seam_marcado_barril.webp
-Objetivo: mostrar concretamente a aparência de um seam marcado (aresta vermelha) sobre um prop do kit, ligando a "dobra da caixa" ao conceito técnico.
-Descrição: um barril (ou caixote) em Edit Mode no Blender com as arestas de seam destacadas em vermelho — fundo, junção vertical traseira e aro inferior — enquanto o restante da malha permanece em preto.
-Como produzir: no Blender, abrir o prop de demonstração, entrar em Edit Mode, selecionar as arestas estratégicas e aplicar Mark Seam. Capturar o Viewport 3D com as arestas vermelhas visíveis.</a:t>
+              <a:t>Notas: Ênfase no "não precisa ser literal": pode ser um objeto simbólico que nunca aparece exatamente igual no kit, mas que concentra a linguagem visual toda. Referência: cronograma, Semana 3.</a:t>
             </a:r>
             <a:endParaRPr lang="en-US" dirty="0"/>
           </a:p>
@@ -1581,7 +2292,7 @@
           <a:p>
             <a:r>
               <a:rPr lang="en-US" dirty="0"/>
-              <a:t>Notas: Estes são os quatro critérios centrais da semana — voltam na demo, no estúdio e na crítica. Pedir à turma exemplos concretos do PRÓPRIO kit: "onde fica o fundo do seu asset? é ali que o seam começa." Conectar ao projeto integrador.</a:t>
+              <a:t>Notas: O Hero Asset é onde cada etapa do pipeline é testada pela primeira vez — UV na Semana 4, material PBR nas Semanas 6-7, texturização no 3D Coat nas Semanas 8-9. Só depois disso validado é que o Kit Modular é produzido de fato, a partir da Semana 10. Não detalhar UV ou PBR agora — apenas nomear a trajetória.</a:t>
             </a:r>
             <a:endParaRPr lang="en-US" dirty="0"/>
           </a:p>
@@ -1669,11 +2380,7 @@
           <a:p>
             <a:r>
               <a:rPr lang="en-US" dirty="0"/>
-              <a:t>Notas: Esta é a heurística que resolve o bloqueio nº 1 da semana ("não sei onde cortar"). É uma ferramenta mental, não técnica. Se o estudante travar, pedir que identifique a "frente" do objeto e comece com o seam nos fundos.
-FIGURA (produzir) — assets/percurso_olhar_jogador.webp
-Objetivo: transformar o critério abstrato "onde o jogador não olha" em uma imagem concreta que oriente a decisão de posicionamento do seam.
-Descrição: um asset arquitetônico do kit visto na perspectiva típica do jogador, com uma seta indicando a linha de visão e as faces ocultas (traseira, base) destacadas como zona segura para seams.
-Como produzir: no Blender, posicionar a câmera na altura/ângulo típico do jogador e renderizar o asset. No Krita, adicionar a seta da linha de visão e sombrear as faces ocultas com uma cor de destaque.</a:t>
+              <a:t>Notas: O Hero Asset é onde os erros são baratos. Essa é a justificativa estratégica, não só didática — vale a pena repetir isso porque explica por que a disciplina inteira gira em torno de uma única peça antes do kit.</a:t>
             </a:r>
             <a:endParaRPr lang="en-US" dirty="0"/>
           </a:p>
@@ -1761,7 +2468,7 @@
           <a:p>
             <a:r>
               <a:rPr lang="en-US" dirty="0"/>
-              <a:t>Notas: Antecipar o erro comum de "seams demais". Medo de distorção leva o estudante a cortar tudo, gerando dezenas de islands minúsculas impossíveis de organizar. Heurística prática: resolva com o mínimo de seams antes de adicionar mais.</a:t>
+              <a:t>Notas: Slide de transição — cada critério ganha um slide próprio a seguir. Pedir que a turma já pense em um candidato próprio enquanto os três são apresentados.</a:t>
             </a:r>
             <a:endParaRPr lang="en-US" dirty="0"/>
           </a:p>
@@ -1849,7 +2556,7 @@
           <a:p>
             <a:r>
               <a:rPr lang="en-US" dirty="0"/>
-              <a:t>Notas: Mencionar padding apenas como PRINCÍPIO, sem números. Se perguntarem valor exato (4 px em 1024): "Vamos medir e empacotar na Semana 4. Hoje, o objetivo é a lógica do corte, não a otimização." NÃO abrir UVPackmaster nem add-ons hoje.</a:t>
+              <a:t>Notas: Testar com exemplo hipotético: um martelo genérico não é legível; um martelo com cabo de viola de cocho entalhado, sim. A legibilidade é sobre especificidade, não sobre "ser bonito".</a:t>
             </a:r>
             <a:endParaRPr lang="en-US" dirty="0"/>
           </a:p>
@@ -2510,9 +3217,321 @@
 </p:sld>
 </file>
 
+<file path=ppt/slides/slide17.xml><?xml version="1.0" encoding="utf-8"?>
+<p:sld xmlns:a="http://schemas.openxmlformats.org/drawingml/2006/main" xmlns:r="http://schemas.openxmlformats.org/officeDocument/2006/relationships" xmlns:p="http://schemas.openxmlformats.org/presentationml/2006/main">
+  <p:cSld name="Slide 17">
+    <p:bg>
+      <p:bgPr>
+        <a:blipFill dpi="0" rotWithShape="1">
+          <a:blip r:embed="rId1">
+            <a:lum/>
+          </a:blip>
+          <a:srcRect/>
+          <a:stretch>
+            <a:fillRect/>
+          </a:stretch>
+        </a:blipFill>
+        <a:effectLst/>
+      </p:bgPr>
+    </p:bg>
+    <p:spTree>
+      <p:nvGrpSpPr>
+        <p:cNvPr id="1" name=""/>
+        <p:cNvGrpSpPr/>
+        <p:nvPr/>
+      </p:nvGrpSpPr>
+      <p:grpSpPr>
+        <a:xfrm>
+          <a:off x="0" y="0"/>
+          <a:ext cx="0" cy="0"/>
+          <a:chOff x="0" y="0"/>
+          <a:chExt cx="0" cy="0"/>
+        </a:xfrm>
+      </p:grpSpPr>
+    </p:spTree>
+  </p:cSld>
+  <p:clrMapOvr>
+    <a:masterClrMapping/>
+  </p:clrMapOvr>
+</p:sld>
+</file>
+
+<file path=ppt/slides/slide18.xml><?xml version="1.0" encoding="utf-8"?>
+<p:sld xmlns:a="http://schemas.openxmlformats.org/drawingml/2006/main" xmlns:r="http://schemas.openxmlformats.org/officeDocument/2006/relationships" xmlns:p="http://schemas.openxmlformats.org/presentationml/2006/main">
+  <p:cSld name="Slide 18">
+    <p:bg>
+      <p:bgPr>
+        <a:blipFill dpi="0" rotWithShape="1">
+          <a:blip r:embed="rId1">
+            <a:lum/>
+          </a:blip>
+          <a:srcRect/>
+          <a:stretch>
+            <a:fillRect/>
+          </a:stretch>
+        </a:blipFill>
+        <a:effectLst/>
+      </p:bgPr>
+    </p:bg>
+    <p:spTree>
+      <p:nvGrpSpPr>
+        <p:cNvPr id="1" name=""/>
+        <p:cNvGrpSpPr/>
+        <p:nvPr/>
+      </p:nvGrpSpPr>
+      <p:grpSpPr>
+        <a:xfrm>
+          <a:off x="0" y="0"/>
+          <a:ext cx="0" cy="0"/>
+          <a:chOff x="0" y="0"/>
+          <a:chExt cx="0" cy="0"/>
+        </a:xfrm>
+      </p:grpSpPr>
+    </p:spTree>
+  </p:cSld>
+  <p:clrMapOvr>
+    <a:masterClrMapping/>
+  </p:clrMapOvr>
+</p:sld>
+</file>
+
+<file path=ppt/slides/slide19.xml><?xml version="1.0" encoding="utf-8"?>
+<p:sld xmlns:a="http://schemas.openxmlformats.org/drawingml/2006/main" xmlns:r="http://schemas.openxmlformats.org/officeDocument/2006/relationships" xmlns:p="http://schemas.openxmlformats.org/presentationml/2006/main">
+  <p:cSld name="Slide 19">
+    <p:bg>
+      <p:bgPr>
+        <a:blipFill dpi="0" rotWithShape="1">
+          <a:blip r:embed="rId1">
+            <a:lum/>
+          </a:blip>
+          <a:srcRect/>
+          <a:stretch>
+            <a:fillRect/>
+          </a:stretch>
+        </a:blipFill>
+        <a:effectLst/>
+      </p:bgPr>
+    </p:bg>
+    <p:spTree>
+      <p:nvGrpSpPr>
+        <p:cNvPr id="1" name=""/>
+        <p:cNvGrpSpPr/>
+        <p:nvPr/>
+      </p:nvGrpSpPr>
+      <p:grpSpPr>
+        <a:xfrm>
+          <a:off x="0" y="0"/>
+          <a:ext cx="0" cy="0"/>
+          <a:chOff x="0" y="0"/>
+          <a:chExt cx="0" cy="0"/>
+        </a:xfrm>
+      </p:grpSpPr>
+    </p:spTree>
+  </p:cSld>
+  <p:clrMapOvr>
+    <a:masterClrMapping/>
+  </p:clrMapOvr>
+</p:sld>
+</file>
+
 <file path=ppt/slides/slide2.xml><?xml version="1.0" encoding="utf-8"?>
 <p:sld xmlns:a="http://schemas.openxmlformats.org/drawingml/2006/main" xmlns:r="http://schemas.openxmlformats.org/officeDocument/2006/relationships" xmlns:p="http://schemas.openxmlformats.org/presentationml/2006/main">
   <p:cSld name="Slide 2">
+    <p:bg>
+      <p:bgPr>
+        <a:blipFill dpi="0" rotWithShape="1">
+          <a:blip r:embed="rId1">
+            <a:lum/>
+          </a:blip>
+          <a:srcRect/>
+          <a:stretch>
+            <a:fillRect/>
+          </a:stretch>
+        </a:blipFill>
+        <a:effectLst/>
+      </p:bgPr>
+    </p:bg>
+    <p:spTree>
+      <p:nvGrpSpPr>
+        <p:cNvPr id="1" name=""/>
+        <p:cNvGrpSpPr/>
+        <p:nvPr/>
+      </p:nvGrpSpPr>
+      <p:grpSpPr>
+        <a:xfrm>
+          <a:off x="0" y="0"/>
+          <a:ext cx="0" cy="0"/>
+          <a:chOff x="0" y="0"/>
+          <a:chExt cx="0" cy="0"/>
+        </a:xfrm>
+      </p:grpSpPr>
+    </p:spTree>
+  </p:cSld>
+  <p:clrMapOvr>
+    <a:masterClrMapping/>
+  </p:clrMapOvr>
+</p:sld>
+</file>
+
+<file path=ppt/slides/slide20.xml><?xml version="1.0" encoding="utf-8"?>
+<p:sld xmlns:a="http://schemas.openxmlformats.org/drawingml/2006/main" xmlns:r="http://schemas.openxmlformats.org/officeDocument/2006/relationships" xmlns:p="http://schemas.openxmlformats.org/presentationml/2006/main">
+  <p:cSld name="Slide 20">
+    <p:bg>
+      <p:bgPr>
+        <a:blipFill dpi="0" rotWithShape="1">
+          <a:blip r:embed="rId1">
+            <a:lum/>
+          </a:blip>
+          <a:srcRect/>
+          <a:stretch>
+            <a:fillRect/>
+          </a:stretch>
+        </a:blipFill>
+        <a:effectLst/>
+      </p:bgPr>
+    </p:bg>
+    <p:spTree>
+      <p:nvGrpSpPr>
+        <p:cNvPr id="1" name=""/>
+        <p:cNvGrpSpPr/>
+        <p:nvPr/>
+      </p:nvGrpSpPr>
+      <p:grpSpPr>
+        <a:xfrm>
+          <a:off x="0" y="0"/>
+          <a:ext cx="0" cy="0"/>
+          <a:chOff x="0" y="0"/>
+          <a:chExt cx="0" cy="0"/>
+        </a:xfrm>
+      </p:grpSpPr>
+    </p:spTree>
+  </p:cSld>
+  <p:clrMapOvr>
+    <a:masterClrMapping/>
+  </p:clrMapOvr>
+</p:sld>
+</file>
+
+<file path=ppt/slides/slide21.xml><?xml version="1.0" encoding="utf-8"?>
+<p:sld xmlns:a="http://schemas.openxmlformats.org/drawingml/2006/main" xmlns:r="http://schemas.openxmlformats.org/officeDocument/2006/relationships" xmlns:p="http://schemas.openxmlformats.org/presentationml/2006/main">
+  <p:cSld name="Slide 21">
+    <p:bg>
+      <p:bgPr>
+        <a:blipFill dpi="0" rotWithShape="1">
+          <a:blip r:embed="rId1">
+            <a:lum/>
+          </a:blip>
+          <a:srcRect/>
+          <a:stretch>
+            <a:fillRect/>
+          </a:stretch>
+        </a:blipFill>
+        <a:effectLst/>
+      </p:bgPr>
+    </p:bg>
+    <p:spTree>
+      <p:nvGrpSpPr>
+        <p:cNvPr id="1" name=""/>
+        <p:cNvGrpSpPr/>
+        <p:nvPr/>
+      </p:nvGrpSpPr>
+      <p:grpSpPr>
+        <a:xfrm>
+          <a:off x="0" y="0"/>
+          <a:ext cx="0" cy="0"/>
+          <a:chOff x="0" y="0"/>
+          <a:chExt cx="0" cy="0"/>
+        </a:xfrm>
+      </p:grpSpPr>
+    </p:spTree>
+  </p:cSld>
+  <p:clrMapOvr>
+    <a:masterClrMapping/>
+  </p:clrMapOvr>
+</p:sld>
+</file>
+
+<file path=ppt/slides/slide22.xml><?xml version="1.0" encoding="utf-8"?>
+<p:sld xmlns:a="http://schemas.openxmlformats.org/drawingml/2006/main" xmlns:r="http://schemas.openxmlformats.org/officeDocument/2006/relationships" xmlns:p="http://schemas.openxmlformats.org/presentationml/2006/main">
+  <p:cSld name="Slide 22">
+    <p:bg>
+      <p:bgPr>
+        <a:blipFill dpi="0" rotWithShape="1">
+          <a:blip r:embed="rId1">
+            <a:lum/>
+          </a:blip>
+          <a:srcRect/>
+          <a:stretch>
+            <a:fillRect/>
+          </a:stretch>
+        </a:blipFill>
+        <a:effectLst/>
+      </p:bgPr>
+    </p:bg>
+    <p:spTree>
+      <p:nvGrpSpPr>
+        <p:cNvPr id="1" name=""/>
+        <p:cNvGrpSpPr/>
+        <p:nvPr/>
+      </p:nvGrpSpPr>
+      <p:grpSpPr>
+        <a:xfrm>
+          <a:off x="0" y="0"/>
+          <a:ext cx="0" cy="0"/>
+          <a:chOff x="0" y="0"/>
+          <a:chExt cx="0" cy="0"/>
+        </a:xfrm>
+      </p:grpSpPr>
+    </p:spTree>
+  </p:cSld>
+  <p:clrMapOvr>
+    <a:masterClrMapping/>
+  </p:clrMapOvr>
+</p:sld>
+</file>
+
+<file path=ppt/slides/slide23.xml><?xml version="1.0" encoding="utf-8"?>
+<p:sld xmlns:a="http://schemas.openxmlformats.org/drawingml/2006/main" xmlns:r="http://schemas.openxmlformats.org/officeDocument/2006/relationships" xmlns:p="http://schemas.openxmlformats.org/presentationml/2006/main">
+  <p:cSld name="Slide 23">
+    <p:bg>
+      <p:bgPr>
+        <a:blipFill dpi="0" rotWithShape="1">
+          <a:blip r:embed="rId1">
+            <a:lum/>
+          </a:blip>
+          <a:srcRect/>
+          <a:stretch>
+            <a:fillRect/>
+          </a:stretch>
+        </a:blipFill>
+        <a:effectLst/>
+      </p:bgPr>
+    </p:bg>
+    <p:spTree>
+      <p:nvGrpSpPr>
+        <p:cNvPr id="1" name=""/>
+        <p:cNvGrpSpPr/>
+        <p:nvPr/>
+      </p:nvGrpSpPr>
+      <p:grpSpPr>
+        <a:xfrm>
+          <a:off x="0" y="0"/>
+          <a:ext cx="0" cy="0"/>
+          <a:chOff x="0" y="0"/>
+          <a:chExt cx="0" cy="0"/>
+        </a:xfrm>
+      </p:grpSpPr>
+    </p:spTree>
+  </p:cSld>
+  <p:clrMapOvr>
+    <a:masterClrMapping/>
+  </p:clrMapOvr>
+</p:sld>
+</file>
+
+<file path=ppt/slides/slide24.xml><?xml version="1.0" encoding="utf-8"?>
+<p:sld xmlns:a="http://schemas.openxmlformats.org/drawingml/2006/main" xmlns:r="http://schemas.openxmlformats.org/officeDocument/2006/relationships" xmlns:p="http://schemas.openxmlformats.org/presentationml/2006/main">
+  <p:cSld name="Slide 24">
     <p:bg>
       <p:bgPr>
         <a:blipFill dpi="0" rotWithShape="1">
